--- a/main_figures.pptx
+++ b/main_figures.pptx
@@ -11,7 +11,7 @@
     <p:sldId id="260" r:id="rId5"/>
     <p:sldId id="261" r:id="rId6"/>
     <p:sldId id="268" r:id="rId7"/>
-    <p:sldId id="259" r:id="rId8"/>
+    <p:sldId id="269" r:id="rId8"/>
   </p:sldIdLst>
   <p:sldSz cx="12192000" cy="10972800"/>
   <p:notesSz cx="6858000" cy="9144000"/>
@@ -145,7 +145,7 @@
         </p14:section>
         <p14:section name="Metabolomic coverage (Figure 7)" id="{90456D20-8F8A-4F73-8352-0AB3FDC379FC}">
           <p14:sldIdLst>
-            <p14:sldId id="259"/>
+            <p14:sldId id="269"/>
           </p14:sldIdLst>
         </p14:section>
       </p14:sectionLst>
@@ -288,7 +288,7 @@
           <a:p>
             <a:fld id="{B61E7E3A-F1E8-439E-8E32-0D394F89298B}" type="datetimeFigureOut">
               <a:rPr lang="es-CL" smtClean="0"/>
-              <a:t>13-12-2025</a:t>
+              <a:t>18-12-2025</a:t>
             </a:fld>
             <a:endParaRPr lang="es-CL"/>
           </a:p>
@@ -458,7 +458,7 @@
           <a:p>
             <a:fld id="{B61E7E3A-F1E8-439E-8E32-0D394F89298B}" type="datetimeFigureOut">
               <a:rPr lang="es-CL" smtClean="0"/>
-              <a:t>13-12-2025</a:t>
+              <a:t>18-12-2025</a:t>
             </a:fld>
             <a:endParaRPr lang="es-CL"/>
           </a:p>
@@ -638,7 +638,7 @@
           <a:p>
             <a:fld id="{B61E7E3A-F1E8-439E-8E32-0D394F89298B}" type="datetimeFigureOut">
               <a:rPr lang="es-CL" smtClean="0"/>
-              <a:t>13-12-2025</a:t>
+              <a:t>18-12-2025</a:t>
             </a:fld>
             <a:endParaRPr lang="es-CL"/>
           </a:p>
@@ -808,7 +808,7 @@
           <a:p>
             <a:fld id="{B61E7E3A-F1E8-439E-8E32-0D394F89298B}" type="datetimeFigureOut">
               <a:rPr lang="es-CL" smtClean="0"/>
-              <a:t>13-12-2025</a:t>
+              <a:t>18-12-2025</a:t>
             </a:fld>
             <a:endParaRPr lang="es-CL"/>
           </a:p>
@@ -1054,7 +1054,7 @@
           <a:p>
             <a:fld id="{B61E7E3A-F1E8-439E-8E32-0D394F89298B}" type="datetimeFigureOut">
               <a:rPr lang="es-CL" smtClean="0"/>
-              <a:t>13-12-2025</a:t>
+              <a:t>18-12-2025</a:t>
             </a:fld>
             <a:endParaRPr lang="es-CL"/>
           </a:p>
@@ -1286,7 +1286,7 @@
           <a:p>
             <a:fld id="{B61E7E3A-F1E8-439E-8E32-0D394F89298B}" type="datetimeFigureOut">
               <a:rPr lang="es-CL" smtClean="0"/>
-              <a:t>13-12-2025</a:t>
+              <a:t>18-12-2025</a:t>
             </a:fld>
             <a:endParaRPr lang="es-CL"/>
           </a:p>
@@ -1653,7 +1653,7 @@
           <a:p>
             <a:fld id="{B61E7E3A-F1E8-439E-8E32-0D394F89298B}" type="datetimeFigureOut">
               <a:rPr lang="es-CL" smtClean="0"/>
-              <a:t>13-12-2025</a:t>
+              <a:t>18-12-2025</a:t>
             </a:fld>
             <a:endParaRPr lang="es-CL"/>
           </a:p>
@@ -1771,7 +1771,7 @@
           <a:p>
             <a:fld id="{B61E7E3A-F1E8-439E-8E32-0D394F89298B}" type="datetimeFigureOut">
               <a:rPr lang="es-CL" smtClean="0"/>
-              <a:t>13-12-2025</a:t>
+              <a:t>18-12-2025</a:t>
             </a:fld>
             <a:endParaRPr lang="es-CL"/>
           </a:p>
@@ -1866,7 +1866,7 @@
           <a:p>
             <a:fld id="{B61E7E3A-F1E8-439E-8E32-0D394F89298B}" type="datetimeFigureOut">
               <a:rPr lang="es-CL" smtClean="0"/>
-              <a:t>13-12-2025</a:t>
+              <a:t>18-12-2025</a:t>
             </a:fld>
             <a:endParaRPr lang="es-CL"/>
           </a:p>
@@ -2143,7 +2143,7 @@
           <a:p>
             <a:fld id="{B61E7E3A-F1E8-439E-8E32-0D394F89298B}" type="datetimeFigureOut">
               <a:rPr lang="es-CL" smtClean="0"/>
-              <a:t>13-12-2025</a:t>
+              <a:t>18-12-2025</a:t>
             </a:fld>
             <a:endParaRPr lang="es-CL"/>
           </a:p>
@@ -2400,7 +2400,7 @@
           <a:p>
             <a:fld id="{B61E7E3A-F1E8-439E-8E32-0D394F89298B}" type="datetimeFigureOut">
               <a:rPr lang="es-CL" smtClean="0"/>
-              <a:t>13-12-2025</a:t>
+              <a:t>18-12-2025</a:t>
             </a:fld>
             <a:endParaRPr lang="es-CL"/>
           </a:p>
@@ -2613,7 +2613,7 @@
           <a:p>
             <a:fld id="{B61E7E3A-F1E8-439E-8E32-0D394F89298B}" type="datetimeFigureOut">
               <a:rPr lang="es-CL" smtClean="0"/>
-              <a:t>13-12-2025</a:t>
+              <a:t>18-12-2025</a:t>
             </a:fld>
             <a:endParaRPr lang="es-CL"/>
           </a:p>
@@ -12124,10 +12124,10 @@
       </p:grpSpPr>
       <p:pic>
         <p:nvPicPr>
-          <p:cNvPr id="5" name="Graphic 4">
-            <a:extLst>
-              <a:ext uri="{FF2B5EF4-FFF2-40B4-BE49-F238E27FC236}">
-                <a16:creationId xmlns:a16="http://schemas.microsoft.com/office/drawing/2014/main" id="{F0601045-E1CF-641D-D051-BDB706C5DA5C}"/>
+          <p:cNvPr id="6" name="Graphic 5">
+            <a:extLst>
+              <a:ext uri="{FF2B5EF4-FFF2-40B4-BE49-F238E27FC236}">
+                <a16:creationId xmlns:a16="http://schemas.microsoft.com/office/drawing/2014/main" id="{7307048A-4A65-389B-7CDB-5AEBDA5D38D0}"/>
               </a:ext>
             </a:extLst>
           </p:cNvPr>
@@ -12144,15 +12144,15 @@
               </a:ext>
             </a:extLst>
           </a:blip>
-          <a:srcRect r="76474" b="11009"/>
+          <a:srcRect t="84854"/>
           <a:stretch>
             <a:fillRect/>
           </a:stretch>
         </p:blipFill>
         <p:spPr>
           <a:xfrm>
-            <a:off x="0" y="3557798"/>
-            <a:ext cx="2868328" cy="3432564"/>
+            <a:off x="4152227" y="5901329"/>
+            <a:ext cx="7442894" cy="366743"/>
           </a:xfrm>
           <a:prstGeom prst="rect">
             <a:avLst/>
@@ -12161,10 +12161,10 @@
       </p:pic>
       <p:sp>
         <p:nvSpPr>
-          <p:cNvPr id="6" name="TextBox 5">
-            <a:extLst>
-              <a:ext uri="{FF2B5EF4-FFF2-40B4-BE49-F238E27FC236}">
-                <a16:creationId xmlns:a16="http://schemas.microsoft.com/office/drawing/2014/main" id="{A48002A3-0E13-B28F-FF8D-384701FE6DF1}"/>
+          <p:cNvPr id="7" name="TextBox 6">
+            <a:extLst>
+              <a:ext uri="{FF2B5EF4-FFF2-40B4-BE49-F238E27FC236}">
+                <a16:creationId xmlns:a16="http://schemas.microsoft.com/office/drawing/2014/main" id="{B33C3535-15BB-EDC8-E9B1-3AD020EF9B5F}"/>
               </a:ext>
             </a:extLst>
           </p:cNvPr>
@@ -12173,8 +12173,8 @@
         </p:nvSpPr>
         <p:spPr>
           <a:xfrm>
-            <a:off x="0" y="3133159"/>
-            <a:ext cx="402674" cy="307777"/>
+            <a:off x="25680" y="1935681"/>
+            <a:ext cx="431528" cy="335476"/>
           </a:xfrm>
           <a:prstGeom prst="rect">
             <a:avLst/>
@@ -12188,7 +12188,7 @@
           <a:lstStyle/>
           <a:p>
             <a:r>
-              <a:rPr lang="en-US" sz="1400" dirty="0">
+              <a:rPr lang="en-US" sz="1580" dirty="0">
                 <a:latin typeface="Arial" panose="020B0604020202020204" pitchFamily="34" charset="0"/>
                 <a:cs typeface="Arial" panose="020B0604020202020204" pitchFamily="34" charset="0"/>
               </a:rPr>
@@ -12199,10 +12199,10 @@
       </p:sp>
       <p:sp>
         <p:nvSpPr>
-          <p:cNvPr id="7" name="TextBox 6">
-            <a:extLst>
-              <a:ext uri="{FF2B5EF4-FFF2-40B4-BE49-F238E27FC236}">
-                <a16:creationId xmlns:a16="http://schemas.microsoft.com/office/drawing/2014/main" id="{62CB39DD-0B72-4662-BC94-59F02CB52382}"/>
+          <p:cNvPr id="8" name="TextBox 7">
+            <a:extLst>
+              <a:ext uri="{FF2B5EF4-FFF2-40B4-BE49-F238E27FC236}">
+                <a16:creationId xmlns:a16="http://schemas.microsoft.com/office/drawing/2014/main" id="{7A1A83F1-F307-87DF-3014-DAEFC09D8BAE}"/>
               </a:ext>
             </a:extLst>
           </p:cNvPr>
@@ -12211,8 +12211,8 @@
         </p:nvSpPr>
         <p:spPr>
           <a:xfrm>
-            <a:off x="3042627" y="3171258"/>
-            <a:ext cx="412292" cy="307777"/>
+            <a:off x="3595508" y="1935681"/>
+            <a:ext cx="431528" cy="335476"/>
           </a:xfrm>
           <a:prstGeom prst="rect">
             <a:avLst/>
@@ -12226,7 +12226,7 @@
           <a:lstStyle/>
           <a:p>
             <a:r>
-              <a:rPr lang="en-US" sz="1400" dirty="0">
+              <a:rPr lang="en-US" sz="1580" dirty="0">
                 <a:latin typeface="Arial" panose="020B0604020202020204" pitchFamily="34" charset="0"/>
                 <a:cs typeface="Arial" panose="020B0604020202020204" pitchFamily="34" charset="0"/>
               </a:rPr>
@@ -12237,10 +12237,10 @@
       </p:sp>
       <p:sp>
         <p:nvSpPr>
-          <p:cNvPr id="8" name="TextBox 7">
-            <a:extLst>
-              <a:ext uri="{FF2B5EF4-FFF2-40B4-BE49-F238E27FC236}">
-                <a16:creationId xmlns:a16="http://schemas.microsoft.com/office/drawing/2014/main" id="{B262CE4D-CEE2-F4F7-F358-BE34D5C61AEC}"/>
+          <p:cNvPr id="9" name="TextBox 8">
+            <a:extLst>
+              <a:ext uri="{FF2B5EF4-FFF2-40B4-BE49-F238E27FC236}">
+                <a16:creationId xmlns:a16="http://schemas.microsoft.com/office/drawing/2014/main" id="{BAD7A00B-4E6D-9F9C-05CA-B670D61EFE16}"/>
               </a:ext>
             </a:extLst>
           </p:cNvPr>
@@ -12249,8 +12249,8 @@
         </p:nvSpPr>
         <p:spPr>
           <a:xfrm>
-            <a:off x="7686033" y="3171258"/>
-            <a:ext cx="393056" cy="307777"/>
+            <a:off x="7888120" y="1935678"/>
+            <a:ext cx="420308" cy="335476"/>
           </a:xfrm>
           <a:prstGeom prst="rect">
             <a:avLst/>
@@ -12264,7 +12264,7 @@
           <a:lstStyle/>
           <a:p>
             <a:r>
-              <a:rPr lang="en-US" sz="1400" dirty="0">
+              <a:rPr lang="en-US" sz="1580" dirty="0">
                 <a:latin typeface="Arial" panose="020B0604020202020204" pitchFamily="34" charset="0"/>
                 <a:cs typeface="Arial" panose="020B0604020202020204" pitchFamily="34" charset="0"/>
               </a:rPr>
@@ -12278,7 +12278,7 @@
           <p:cNvPr id="11" name="Graphic 10">
             <a:extLst>
               <a:ext uri="{FF2B5EF4-FFF2-40B4-BE49-F238E27FC236}">
-                <a16:creationId xmlns:a16="http://schemas.microsoft.com/office/drawing/2014/main" id="{5189B271-A223-9476-796B-E08EDFA0C31F}"/>
+                <a16:creationId xmlns:a16="http://schemas.microsoft.com/office/drawing/2014/main" id="{90D82071-1DC4-118E-F058-73BD8B02D90C}"/>
               </a:ext>
             </a:extLst>
           </p:cNvPr>
@@ -12288,96 +12288,21 @@
           <p:nvPr/>
         </p:nvPicPr>
         <p:blipFill>
-          <a:blip r:embed="rId2">
+          <a:blip r:embed="rId4">
             <a:extLst>
               <a:ext uri="{96DAC541-7B7A-43D3-8B79-37D633B846F1}">
-                <asvg:svgBlip xmlns:asvg="http://schemas.microsoft.com/office/drawing/2016/SVG/main" r:embed="rId3"/>
+                <asvg:svgBlip xmlns:asvg="http://schemas.microsoft.com/office/drawing/2016/SVG/main" r:embed="rId5"/>
               </a:ext>
             </a:extLst>
           </a:blip>
-          <a:srcRect l="64033" b="11009"/>
           <a:stretch>
             <a:fillRect/>
           </a:stretch>
         </p:blipFill>
         <p:spPr>
           <a:xfrm>
-            <a:off x="7666520" y="3440935"/>
-            <a:ext cx="4385118" cy="3432564"/>
-          </a:xfrm>
-          <a:prstGeom prst="rect">
-            <a:avLst/>
-          </a:prstGeom>
-        </p:spPr>
-      </p:pic>
-      <p:pic>
-        <p:nvPicPr>
-          <p:cNvPr id="12" name="Graphic 11">
-            <a:extLst>
-              <a:ext uri="{FF2B5EF4-FFF2-40B4-BE49-F238E27FC236}">
-                <a16:creationId xmlns:a16="http://schemas.microsoft.com/office/drawing/2014/main" id="{FBD4D06A-ECD8-C2B3-9901-FC9918527555}"/>
-              </a:ext>
-            </a:extLst>
-          </p:cNvPr>
-          <p:cNvPicPr>
-            <a:picLocks noChangeAspect="1"/>
-          </p:cNvPicPr>
-          <p:nvPr/>
-        </p:nvPicPr>
-        <p:blipFill>
-          <a:blip r:embed="rId2">
-            <a:extLst>
-              <a:ext uri="{96DAC541-7B7A-43D3-8B79-37D633B846F1}">
-                <asvg:svgBlip xmlns:asvg="http://schemas.microsoft.com/office/drawing/2016/SVG/main" r:embed="rId3"/>
-              </a:ext>
-            </a:extLst>
-          </a:blip>
-          <a:srcRect l="33329" t="89906" r="33671" b="921"/>
-          <a:stretch>
-            <a:fillRect/>
-          </a:stretch>
-        </p:blipFill>
-        <p:spPr>
-          <a:xfrm>
-            <a:off x="5526171" y="6940878"/>
-            <a:ext cx="4023361" cy="353825"/>
-          </a:xfrm>
-          <a:prstGeom prst="rect">
-            <a:avLst/>
-          </a:prstGeom>
-        </p:spPr>
-      </p:pic>
-      <p:pic>
-        <p:nvPicPr>
-          <p:cNvPr id="13" name="Graphic 12">
-            <a:extLst>
-              <a:ext uri="{FF2B5EF4-FFF2-40B4-BE49-F238E27FC236}">
-                <a16:creationId xmlns:a16="http://schemas.microsoft.com/office/drawing/2014/main" id="{2C3515FE-243D-D564-8C86-70541B638C1A}"/>
-              </a:ext>
-            </a:extLst>
-          </p:cNvPr>
-          <p:cNvPicPr>
-            <a:picLocks noChangeAspect="1"/>
-          </p:cNvPicPr>
-          <p:nvPr/>
-        </p:nvPicPr>
-        <p:blipFill>
-          <a:blip r:embed="rId2">
-            <a:extLst>
-              <a:ext uri="{96DAC541-7B7A-43D3-8B79-37D633B846F1}">
-                <asvg:svgBlip xmlns:asvg="http://schemas.microsoft.com/office/drawing/2016/SVG/main" r:embed="rId3"/>
-              </a:ext>
-            </a:extLst>
-          </a:blip>
-          <a:srcRect l="27282" r="36009" b="11009"/>
-          <a:stretch>
-            <a:fillRect/>
-          </a:stretch>
-        </p:blipFill>
-        <p:spPr>
-          <a:xfrm>
-            <a:off x="2933685" y="3440935"/>
-            <a:ext cx="4475497" cy="3432564"/>
+            <a:off x="25680" y="2438400"/>
+            <a:ext cx="11864234" cy="3295621"/>
           </a:xfrm>
           <a:prstGeom prst="rect">
             <a:avLst/>
@@ -12387,7 +12312,7 @@
     </p:spTree>
     <p:extLst>
       <p:ext uri="{BB962C8B-B14F-4D97-AF65-F5344CB8AC3E}">
-        <p14:creationId xmlns:p14="http://schemas.microsoft.com/office/powerpoint/2010/main" val="3246029785"/>
+        <p14:creationId xmlns:p14="http://schemas.microsoft.com/office/powerpoint/2010/main" val="3729487395"/>
       </p:ext>
     </p:extLst>
   </p:cSld>
